--- a/docs/Snapdragoon-deck.pptx
+++ b/docs/Snapdragoon-deck.pptx
@@ -14042,7 +14042,7 @@
                 </a:solidFill>
                 <a:latin typeface="Calibri"/>
               </a:rPr>
-              <a:t>126</a:t>
+              <a:t>134</a:t>
             </a:r>
           </a:p>
         </p:txBody>
